--- a/session-7/deck/MOI_Builders_S7.pptx
+++ b/session-7/deck/MOI_Builders_S7.pptx
@@ -808,14 +808,15 @@
           "I never gave it that URL."
   step 3  catalog is free — questions public, answers paid
   step 4  check "decided by" shows the model. "crash" isn't in the catalog; it says "draw down"
-  step 5  HTTP 402 — reserved since 1997. Seller says WHY it charges this.
-  step 6  ** SLOW DOWN ** the identity check. payTo is 32 bytes: it says WHERE, not WHOSE.
-  step 7  real interaction hash — CLICK IT to copy, paste into voyage.moi.technology
-  step 8  seven checks, all read-only, seller reads the chain itself
-  step 9  answer appears, balance drops
+  step 5  HTTP 402 — reserved since 1997. The seller says WHY it charges this; it decided.
+  step 6  the buyer decides that price is worth paying. two agents, two decisions.
+  step 7  ** SLOW DOWN ** the identity check. payTo is 32 bytes: it says WHERE, not WHOSE.
+  step 8  real interaction hash — CLICK IT to copy, paste into voyage.moi.technology
+  step 9  seven checks, all read-only, seller reads the chain itself
+  step 10 answer appears, balance drops by 3
 SAY OUT LOUD: the probabilities are made up. No model, no market data.
 REFUSAL — tick "Simulate a compromised listing", ask again.
-  Stops at step 6. "Money moved: none" is literal — no transaction was ever built.
+  Stops at step 7. "Money moved: none" is literal — no transaction was ever built.
   The party with something to lose is the one that checked.
 If the happy path refuses: you Ctrl-C'd a tamper run. Rerun --tamper and let it finish.</a:t>
             </a:r>
@@ -909,7 +910,7 @@
 payment-proof.ts — "Two messages. The seller sends a Quote: price, asset, where to pay, and its
 agent id. The buyer sends back a Claim: I sent this much, to you, in this transaction, for this
 thing, signed." Point at payToAgentId — without it, payTo is anonymous bytes.
-identity-check.ts — WHOLE FILE ON SCREEN, 39 lines, don't scroll. Point at ONE line:
+identity-check.ts — WHOLE FILE ON SCREEN, 42 lines, don't scroll. Point at ONE line:
   if (normalizeAddress(registryWallet) !== normalizeAddress(quote.payTo))
 "Read the registered wallet off the chain. Compare it to the invoice. Refuse if they disagree.
 No payment protocol can answer that on its own — it needs an identity both parties can check."
@@ -4717,7 +4718,7 @@
                 <a:ea typeface="Inter" pitchFamily="34" charset="-122"/>
                 <a:cs typeface="Inter" pitchFamily="34" charset="-120"/>
               </a:rPr>
-              <a:t>39 lines. this is the session.</a:t>
+              <a:t>42 lines. this is the session.</a:t>
             </a:r>
             <a:endParaRPr lang="en-US" sz="1250" dirty="0"/>
           </a:p>
